--- a/eval/out/canvas_hero.pptx
+++ b/eval/out/canvas_hero.pptx
@@ -3984,6 +3984,24 @@
               <a:t>214 </a:t>
             </a:r>
             <a:r>
+              <a:rPr sz="585" b="0" i="0" baseline="30000">
+                <a:solidFill>
+                  <a:srgbClr val="C55A11"/>
+                </a:solidFill>
+                <a:latin typeface="Segoe UI Symbol"/>
+              </a:rPr>
+              <a:t>◐</a:t>
+            </a:r>
+            <a:r>
+              <a:rPr sz="900" b="0" i="0">
+                <a:solidFill>
+                  <a:srgbClr val="C55A11"/>
+                </a:solidFill>
+                <a:latin typeface="Segoe UI"/>
+              </a:rPr>
+              <a:t> </a:t>
+            </a:r>
+            <a:r>
               <a:rPr sz="900" b="0" i="0">
                 <a:solidFill>
                   <a:srgbClr val="C55A11"/>
@@ -4702,7 +4720,16 @@
                 </a:solidFill>
                 <a:latin typeface="Georgia"/>
               </a:rPr>
-              <a:t>3.4x</a:t>
+              <a:t>3.4x </a:t>
+            </a:r>
+            <a:r>
+              <a:rPr sz="4160" b="0" i="0" baseline="30000">
+                <a:solidFill>
+                  <a:srgbClr val="FFFFFF"/>
+                </a:solidFill>
+                <a:latin typeface="Segoe UI Symbol"/>
+              </a:rPr>
+              <a:t>◐</a:t>
             </a:r>
           </a:p>
         </p:txBody>

--- a/eval/out/canvas_hero.pptx
+++ b/eval/out/canvas_hero.pptx
@@ -4049,7 +4049,7 @@
         <p:spPr>
           <a:xfrm>
             <a:off x="411480" y="1444752"/>
-            <a:ext cx="4320235" cy="4892040"/>
+            <a:ext cx="4263390" cy="4892040"/>
           </a:xfrm>
           <a:prstGeom prst="rect">
             <a:avLst/>
@@ -4093,8 +4093,8 @@
           <p:nvPr/>
         </p:nvGraphicFramePr>
         <p:xfrm>
-          <a:off x="5186477" y="1542593"/>
-          <a:ext cx="6366662" cy="3055998"/>
+          <a:off x="5148580" y="1444752"/>
+          <a:ext cx="6631940" cy="3108960"/>
         </p:xfrm>
         <a:graphic>
           <a:graphicData uri="http://schemas.openxmlformats.org/drawingml/2006/chart">
@@ -4110,8 +4110,8 @@
         </p:nvSpPr>
         <p:spPr>
           <a:xfrm>
-            <a:off x="5186477" y="4621451"/>
-            <a:ext cx="6366662" cy="129857"/>
+            <a:off x="5148580" y="4576572"/>
+            <a:ext cx="6631940" cy="129857"/>
           </a:xfrm>
           <a:prstGeom prst="rect">
             <a:avLst/>
@@ -4200,8 +4200,8 @@
         </p:nvSpPr>
         <p:spPr>
           <a:xfrm>
-            <a:off x="5186477" y="4771339"/>
-            <a:ext cx="1932737" cy="684886"/>
+            <a:off x="5148580" y="4808030"/>
+            <a:ext cx="1894840" cy="611505"/>
           </a:xfrm>
           <a:prstGeom prst="roundRect">
             <a:avLst>
@@ -4294,8 +4294,8 @@
         </p:nvSpPr>
         <p:spPr>
           <a:xfrm>
-            <a:off x="7403440" y="4771339"/>
-            <a:ext cx="1932737" cy="684886"/>
+            <a:off x="7517130" y="4808030"/>
+            <a:ext cx="1894840" cy="611505"/>
           </a:xfrm>
           <a:prstGeom prst="roundRect">
             <a:avLst>
@@ -4388,8 +4388,8 @@
         </p:nvSpPr>
         <p:spPr>
           <a:xfrm>
-            <a:off x="9620402" y="4771339"/>
-            <a:ext cx="1932737" cy="684886"/>
+            <a:off x="9411970" y="4808030"/>
+            <a:ext cx="2368550" cy="611505"/>
           </a:xfrm>
           <a:prstGeom prst="roundRect">
             <a:avLst>
@@ -4482,8 +4482,8 @@
         </p:nvCxnSpPr>
         <p:spPr>
           <a:xfrm>
-            <a:off x="5186477" y="5700826"/>
-            <a:ext cx="6366662" cy="0"/>
+            <a:off x="5148580" y="5517375"/>
+            <a:ext cx="6631940" cy="0"/>
           </a:xfrm>
           <a:prstGeom prst="line">
             <a:avLst/>
@@ -4517,8 +4517,8 @@
         </p:nvSpPr>
         <p:spPr>
           <a:xfrm>
-            <a:off x="5186477" y="5749747"/>
-            <a:ext cx="6366662" cy="489204"/>
+            <a:off x="5148580" y="5725287"/>
+            <a:ext cx="6631940" cy="611505"/>
           </a:xfrm>
           <a:prstGeom prst="rect">
             <a:avLst/>
@@ -4634,8 +4634,8 @@
         </p:nvSpPr>
         <p:spPr>
           <a:xfrm>
-            <a:off x="752551" y="1933956"/>
-            <a:ext cx="3638093" cy="489204"/>
+            <a:off x="885190" y="2056257"/>
+            <a:ext cx="3315970" cy="305752"/>
           </a:xfrm>
           <a:prstGeom prst="rect">
             <a:avLst/>
@@ -4688,8 +4688,8 @@
         </p:nvSpPr>
         <p:spPr>
           <a:xfrm>
-            <a:off x="752551" y="2521001"/>
-            <a:ext cx="3638093" cy="1467612"/>
+            <a:off x="885190" y="2362010"/>
+            <a:ext cx="3315970" cy="1528762"/>
           </a:xfrm>
           <a:prstGeom prst="rect">
             <a:avLst/>
@@ -4742,8 +4742,8 @@
         </p:nvSpPr>
         <p:spPr>
           <a:xfrm>
-            <a:off x="752551" y="4184294"/>
-            <a:ext cx="3638093" cy="1369771"/>
+            <a:off x="885190" y="4196524"/>
+            <a:ext cx="3315970" cy="1223010"/>
           </a:xfrm>
           <a:prstGeom prst="rect">
             <a:avLst/>
@@ -4891,16 +4891,7 @@
                 </a:solidFill>
                 <a:latin typeface="Segoe UI"/>
               </a:rPr>
-              <a:t>on </a:t>
-            </a:r>
-            <a:r>
-              <a:rPr sz="900" b="0" i="0">
-                <a:solidFill>
-                  <a:srgbClr val="FFFFFF"/>
-                </a:solidFill>
-                <a:latin typeface="Segoe UI"/>
-              </a:rPr>
-              <a:t>flood</a:t>
+              <a:t>on</a:t>
             </a:r>
           </a:p>
           <a:p>
@@ -4922,6 +4913,15 @@
                 </a:solidFill>
                 <a:latin typeface="Segoe UI"/>
               </a:rPr>
+              <a:t>flood </a:t>
+            </a:r>
+            <a:r>
+              <a:rPr sz="900" b="0" i="0">
+                <a:solidFill>
+                  <a:srgbClr val="FFFFFF"/>
+                </a:solidFill>
+                <a:latin typeface="Segoe UI"/>
+              </a:rPr>
               <a:t>irrigation </a:t>
             </a:r>
             <a:r>
@@ -4985,8 +4985,21 @@
                 </a:solidFill>
                 <a:latin typeface="Segoe UI"/>
               </a:rPr>
-              <a:t>water-stressed </a:t>
-            </a:r>
+              <a:t>water-stressed</a:t>
+            </a:r>
+          </a:p>
+          <a:p>
+            <a:pPr algn="l">
+              <a:lnSpc>
+                <a:spcPts val="1227"/>
+              </a:lnSpc>
+              <a:spcBef>
+                <a:spcPts val="0"/>
+              </a:spcBef>
+              <a:spcAft>
+                <a:spcPts val="0"/>
+              </a:spcAft>
+            </a:pPr>
             <a:r>
               <a:rPr sz="900" b="0" i="0">
                 <a:solidFill>
